--- a/tests/corpus/pptx/generated/text-effects.pptx
+++ b/tests/corpus/pptx/generated/text-effects.pptx
@@ -8,6 +8,7 @@
     <p:sldId id="256" r:id="rId2"/>
     <p:sldId id="257" r:id="rId3"/>
     <p:sldId id="258" r:id="rId4"/>
+    <p:sldId id="259" r:id="rId5"/>
   </p:sldIdLst>
   <p:sldSz cx="12192000" cy="6858000"/>
   <p:notesSz cx="6858000" cy="9144000"/>
@@ -131,7 +132,7 @@
           <p:cNvPr id="2" name="Titel 1">
             <a:extLst>
               <a:ext uri="{FF2B5EF4-FFF2-40B4-BE49-F238E27FC236}">
-                <a16:creationId xmlns:a16="http://schemas.microsoft.com/office/drawing/2014/main" id="{10A77B5C-AE00-4351-B55C-2B5BAF9EAA66}"/>
+                <a16:creationId xmlns:a16="http://schemas.microsoft.com/office/drawing/2014/main" id="{072A21AC-3A93-D2C2-884A-CA8C1B337DB1}"/>
               </a:ext>
             </a:extLst>
           </p:cNvPr>
@@ -168,7 +169,7 @@
           <p:cNvPr id="3" name="Untertitel 2">
             <a:extLst>
               <a:ext uri="{FF2B5EF4-FFF2-40B4-BE49-F238E27FC236}">
-                <a16:creationId xmlns:a16="http://schemas.microsoft.com/office/drawing/2014/main" id="{B32EDDE5-10B8-D87A-B49E-AA318006EB3B}"/>
+                <a16:creationId xmlns:a16="http://schemas.microsoft.com/office/drawing/2014/main" id="{2E9471C2-23BC-60C3-3C54-546B6F5F5673}"/>
               </a:ext>
             </a:extLst>
           </p:cNvPr>
@@ -238,7 +239,7 @@
           <p:cNvPr id="4" name="Datumsplatzhalter 3">
             <a:extLst>
               <a:ext uri="{FF2B5EF4-FFF2-40B4-BE49-F238E27FC236}">
-                <a16:creationId xmlns:a16="http://schemas.microsoft.com/office/drawing/2014/main" id="{6FEA29E7-DE9B-1B40-A5F4-C5A1C13D3525}"/>
+                <a16:creationId xmlns:a16="http://schemas.microsoft.com/office/drawing/2014/main" id="{8A7B76DE-FE0D-AEDE-BA5E-6620E045A107}"/>
               </a:ext>
             </a:extLst>
           </p:cNvPr>
@@ -254,9 +255,9 @@
           <a:bodyPr/>
           <a:lstStyle/>
           <a:p>
-            <a:fld id="{62A7C567-FA52-4AEF-97AB-C5FB6C1B2C2B}" type="datetimeFigureOut">
+            <a:fld id="{874CF8F7-EC0C-4A2A-935F-BEAAA7E99727}" type="datetimeFigureOut">
               <a:rPr lang="de-DE" smtClean="0"/>
-              <a:t>08.10.2026</a:t>
+              <a:t>09.10.2026</a:t>
             </a:fld>
             <a:endParaRPr lang="de-DE"/>
           </a:p>
@@ -267,7 +268,7 @@
           <p:cNvPr id="5" name="Fußzeilenplatzhalter 4">
             <a:extLst>
               <a:ext uri="{FF2B5EF4-FFF2-40B4-BE49-F238E27FC236}">
-                <a16:creationId xmlns:a16="http://schemas.microsoft.com/office/drawing/2014/main" id="{E5CD449A-5EAF-9DC6-57E9-D8D4BC9BA8ED}"/>
+                <a16:creationId xmlns:a16="http://schemas.microsoft.com/office/drawing/2014/main" id="{C0540B5A-1256-6DC5-6CCF-3CE711028223}"/>
               </a:ext>
             </a:extLst>
           </p:cNvPr>
@@ -292,7 +293,7 @@
           <p:cNvPr id="6" name="Foliennummernplatzhalter 5">
             <a:extLst>
               <a:ext uri="{FF2B5EF4-FFF2-40B4-BE49-F238E27FC236}">
-                <a16:creationId xmlns:a16="http://schemas.microsoft.com/office/drawing/2014/main" id="{EC1599A1-56ED-8A63-47BC-E2E56C5DD86A}"/>
+                <a16:creationId xmlns:a16="http://schemas.microsoft.com/office/drawing/2014/main" id="{268C1DD6-2506-E202-6A3E-939632268008}"/>
               </a:ext>
             </a:extLst>
           </p:cNvPr>
@@ -308,7 +309,7 @@
           <a:bodyPr/>
           <a:lstStyle/>
           <a:p>
-            <a:fld id="{D158536F-3462-463E-B364-EF9586669638}" type="slidenum">
+            <a:fld id="{FABBB043-4E18-4521-8605-93A596019FC4}" type="slidenum">
               <a:rPr lang="de-DE" smtClean="0"/>
               <a:t>‹Nr.›</a:t>
             </a:fld>
@@ -319,7 +320,7 @@
     </p:spTree>
     <p:extLst>
       <p:ext uri="{BB962C8B-B14F-4D97-AF65-F5344CB8AC3E}">
-        <p14:creationId xmlns:p14="http://schemas.microsoft.com/office/powerpoint/2010/main" val="2995176341"/>
+        <p14:creationId xmlns:p14="http://schemas.microsoft.com/office/powerpoint/2010/main" val="2369777037"/>
       </p:ext>
     </p:extLst>
   </p:cSld>
@@ -351,7 +352,7 @@
           <p:cNvPr id="2" name="Titel 1">
             <a:extLst>
               <a:ext uri="{FF2B5EF4-FFF2-40B4-BE49-F238E27FC236}">
-                <a16:creationId xmlns:a16="http://schemas.microsoft.com/office/drawing/2014/main" id="{EE44AAA0-5F52-C060-97DF-F5AAB700A668}"/>
+                <a16:creationId xmlns:a16="http://schemas.microsoft.com/office/drawing/2014/main" id="{3AC9CE3B-86B7-92A7-A36C-AC308B5BB06D}"/>
               </a:ext>
             </a:extLst>
           </p:cNvPr>
@@ -379,7 +380,7 @@
           <p:cNvPr id="3" name="Vertikaler Textplatzhalter 2">
             <a:extLst>
               <a:ext uri="{FF2B5EF4-FFF2-40B4-BE49-F238E27FC236}">
-                <a16:creationId xmlns:a16="http://schemas.microsoft.com/office/drawing/2014/main" id="{CEEE2E23-4D20-6E4C-F549-92AF3A9625BC}"/>
+                <a16:creationId xmlns:a16="http://schemas.microsoft.com/office/drawing/2014/main" id="{E285D962-034F-6D6C-FEBB-F15EB496F3F4}"/>
               </a:ext>
             </a:extLst>
           </p:cNvPr>
@@ -436,7 +437,7 @@
           <p:cNvPr id="4" name="Datumsplatzhalter 3">
             <a:extLst>
               <a:ext uri="{FF2B5EF4-FFF2-40B4-BE49-F238E27FC236}">
-                <a16:creationId xmlns:a16="http://schemas.microsoft.com/office/drawing/2014/main" id="{FA6B843A-6A66-DE8B-459C-1823287DFA40}"/>
+                <a16:creationId xmlns:a16="http://schemas.microsoft.com/office/drawing/2014/main" id="{D447C050-3BA2-06E9-09AF-9704472BD317}"/>
               </a:ext>
             </a:extLst>
           </p:cNvPr>
@@ -452,9 +453,9 @@
           <a:bodyPr/>
           <a:lstStyle/>
           <a:p>
-            <a:fld id="{62A7C567-FA52-4AEF-97AB-C5FB6C1B2C2B}" type="datetimeFigureOut">
+            <a:fld id="{874CF8F7-EC0C-4A2A-935F-BEAAA7E99727}" type="datetimeFigureOut">
               <a:rPr lang="de-DE" smtClean="0"/>
-              <a:t>08.10.2026</a:t>
+              <a:t>09.10.2026</a:t>
             </a:fld>
             <a:endParaRPr lang="de-DE"/>
           </a:p>
@@ -465,7 +466,7 @@
           <p:cNvPr id="5" name="Fußzeilenplatzhalter 4">
             <a:extLst>
               <a:ext uri="{FF2B5EF4-FFF2-40B4-BE49-F238E27FC236}">
-                <a16:creationId xmlns:a16="http://schemas.microsoft.com/office/drawing/2014/main" id="{017A1661-49FC-CB21-CFE4-BBC5D30956D5}"/>
+                <a16:creationId xmlns:a16="http://schemas.microsoft.com/office/drawing/2014/main" id="{0B0B817D-7709-0BDD-17A2-97E847378260}"/>
               </a:ext>
             </a:extLst>
           </p:cNvPr>
@@ -490,7 +491,7 @@
           <p:cNvPr id="6" name="Foliennummernplatzhalter 5">
             <a:extLst>
               <a:ext uri="{FF2B5EF4-FFF2-40B4-BE49-F238E27FC236}">
-                <a16:creationId xmlns:a16="http://schemas.microsoft.com/office/drawing/2014/main" id="{ED298AA1-1BCC-9228-6835-1E5A38C4A875}"/>
+                <a16:creationId xmlns:a16="http://schemas.microsoft.com/office/drawing/2014/main" id="{426F9889-F268-07D8-5327-E5BB3786E7B7}"/>
               </a:ext>
             </a:extLst>
           </p:cNvPr>
@@ -506,7 +507,7 @@
           <a:bodyPr/>
           <a:lstStyle/>
           <a:p>
-            <a:fld id="{D158536F-3462-463E-B364-EF9586669638}" type="slidenum">
+            <a:fld id="{FABBB043-4E18-4521-8605-93A596019FC4}" type="slidenum">
               <a:rPr lang="de-DE" smtClean="0"/>
               <a:t>‹Nr.›</a:t>
             </a:fld>
@@ -517,7 +518,7 @@
     </p:spTree>
     <p:extLst>
       <p:ext uri="{BB962C8B-B14F-4D97-AF65-F5344CB8AC3E}">
-        <p14:creationId xmlns:p14="http://schemas.microsoft.com/office/powerpoint/2010/main" val="1997134721"/>
+        <p14:creationId xmlns:p14="http://schemas.microsoft.com/office/powerpoint/2010/main" val="225678685"/>
       </p:ext>
     </p:extLst>
   </p:cSld>
@@ -549,7 +550,7 @@
           <p:cNvPr id="2" name="Vertikaler Titel 1">
             <a:extLst>
               <a:ext uri="{FF2B5EF4-FFF2-40B4-BE49-F238E27FC236}">
-                <a16:creationId xmlns:a16="http://schemas.microsoft.com/office/drawing/2014/main" id="{CE206EC8-7C33-73B5-8DC2-E9B9E5378B4C}"/>
+                <a16:creationId xmlns:a16="http://schemas.microsoft.com/office/drawing/2014/main" id="{1F39C8F7-ED12-93E9-EFF9-5F968113C777}"/>
               </a:ext>
             </a:extLst>
           </p:cNvPr>
@@ -582,7 +583,7 @@
           <p:cNvPr id="3" name="Vertikaler Textplatzhalter 2">
             <a:extLst>
               <a:ext uri="{FF2B5EF4-FFF2-40B4-BE49-F238E27FC236}">
-                <a16:creationId xmlns:a16="http://schemas.microsoft.com/office/drawing/2014/main" id="{A5CFBB4B-BD86-8D4C-9281-581CC597164A}"/>
+                <a16:creationId xmlns:a16="http://schemas.microsoft.com/office/drawing/2014/main" id="{6E40BB17-F728-F901-659E-6F1A5215D277}"/>
               </a:ext>
             </a:extLst>
           </p:cNvPr>
@@ -644,7 +645,7 @@
           <p:cNvPr id="4" name="Datumsplatzhalter 3">
             <a:extLst>
               <a:ext uri="{FF2B5EF4-FFF2-40B4-BE49-F238E27FC236}">
-                <a16:creationId xmlns:a16="http://schemas.microsoft.com/office/drawing/2014/main" id="{FB2981B5-1C00-35EF-2399-5E3DFCC4BF99}"/>
+                <a16:creationId xmlns:a16="http://schemas.microsoft.com/office/drawing/2014/main" id="{EDB69935-D9BB-DFB1-C1A3-3E8F7C325261}"/>
               </a:ext>
             </a:extLst>
           </p:cNvPr>
@@ -660,9 +661,9 @@
           <a:bodyPr/>
           <a:lstStyle/>
           <a:p>
-            <a:fld id="{62A7C567-FA52-4AEF-97AB-C5FB6C1B2C2B}" type="datetimeFigureOut">
+            <a:fld id="{874CF8F7-EC0C-4A2A-935F-BEAAA7E99727}" type="datetimeFigureOut">
               <a:rPr lang="de-DE" smtClean="0"/>
-              <a:t>08.10.2026</a:t>
+              <a:t>09.10.2026</a:t>
             </a:fld>
             <a:endParaRPr lang="de-DE"/>
           </a:p>
@@ -673,7 +674,7 @@
           <p:cNvPr id="5" name="Fußzeilenplatzhalter 4">
             <a:extLst>
               <a:ext uri="{FF2B5EF4-FFF2-40B4-BE49-F238E27FC236}">
-                <a16:creationId xmlns:a16="http://schemas.microsoft.com/office/drawing/2014/main" id="{967BBE87-8067-B1F3-A153-BAF013EACDCD}"/>
+                <a16:creationId xmlns:a16="http://schemas.microsoft.com/office/drawing/2014/main" id="{C4E06397-D813-420C-3515-CBC3226FC975}"/>
               </a:ext>
             </a:extLst>
           </p:cNvPr>
@@ -698,7 +699,7 @@
           <p:cNvPr id="6" name="Foliennummernplatzhalter 5">
             <a:extLst>
               <a:ext uri="{FF2B5EF4-FFF2-40B4-BE49-F238E27FC236}">
-                <a16:creationId xmlns:a16="http://schemas.microsoft.com/office/drawing/2014/main" id="{6ADB3E2D-AC1D-6CAC-2887-F2DD14D38A8C}"/>
+                <a16:creationId xmlns:a16="http://schemas.microsoft.com/office/drawing/2014/main" id="{94D77C14-D8F0-2287-447A-3CDFDC9128D6}"/>
               </a:ext>
             </a:extLst>
           </p:cNvPr>
@@ -714,7 +715,7 @@
           <a:bodyPr/>
           <a:lstStyle/>
           <a:p>
-            <a:fld id="{D158536F-3462-463E-B364-EF9586669638}" type="slidenum">
+            <a:fld id="{FABBB043-4E18-4521-8605-93A596019FC4}" type="slidenum">
               <a:rPr lang="de-DE" smtClean="0"/>
               <a:t>‹Nr.›</a:t>
             </a:fld>
@@ -725,7 +726,7 @@
     </p:spTree>
     <p:extLst>
       <p:ext uri="{BB962C8B-B14F-4D97-AF65-F5344CB8AC3E}">
-        <p14:creationId xmlns:p14="http://schemas.microsoft.com/office/powerpoint/2010/main" val="1282313564"/>
+        <p14:creationId xmlns:p14="http://schemas.microsoft.com/office/powerpoint/2010/main" val="1785099031"/>
       </p:ext>
     </p:extLst>
   </p:cSld>
@@ -757,7 +758,7 @@
           <p:cNvPr id="2" name="Titel 1">
             <a:extLst>
               <a:ext uri="{FF2B5EF4-FFF2-40B4-BE49-F238E27FC236}">
-                <a16:creationId xmlns:a16="http://schemas.microsoft.com/office/drawing/2014/main" id="{7FBEF72F-806A-8D93-EFB9-D267678A7D34}"/>
+                <a16:creationId xmlns:a16="http://schemas.microsoft.com/office/drawing/2014/main" id="{1214FE59-D4AD-39D5-7C3A-9B7618870C79}"/>
               </a:ext>
             </a:extLst>
           </p:cNvPr>
@@ -785,7 +786,7 @@
           <p:cNvPr id="3" name="Inhaltsplatzhalter 2">
             <a:extLst>
               <a:ext uri="{FF2B5EF4-FFF2-40B4-BE49-F238E27FC236}">
-                <a16:creationId xmlns:a16="http://schemas.microsoft.com/office/drawing/2014/main" id="{AE6B0455-34AA-F8E3-2C8A-38D1FE0FD205}"/>
+                <a16:creationId xmlns:a16="http://schemas.microsoft.com/office/drawing/2014/main" id="{9EC5E49E-419A-9959-E941-47941713F141}"/>
               </a:ext>
             </a:extLst>
           </p:cNvPr>
@@ -842,7 +843,7 @@
           <p:cNvPr id="4" name="Datumsplatzhalter 3">
             <a:extLst>
               <a:ext uri="{FF2B5EF4-FFF2-40B4-BE49-F238E27FC236}">
-                <a16:creationId xmlns:a16="http://schemas.microsoft.com/office/drawing/2014/main" id="{E811C0E7-1552-1C5E-6576-6428B5810E75}"/>
+                <a16:creationId xmlns:a16="http://schemas.microsoft.com/office/drawing/2014/main" id="{9EE8AB1F-C9AF-A174-1AA5-AC5DF5A4FEE1}"/>
               </a:ext>
             </a:extLst>
           </p:cNvPr>
@@ -858,9 +859,9 @@
           <a:bodyPr/>
           <a:lstStyle/>
           <a:p>
-            <a:fld id="{62A7C567-FA52-4AEF-97AB-C5FB6C1B2C2B}" type="datetimeFigureOut">
+            <a:fld id="{874CF8F7-EC0C-4A2A-935F-BEAAA7E99727}" type="datetimeFigureOut">
               <a:rPr lang="de-DE" smtClean="0"/>
-              <a:t>08.10.2026</a:t>
+              <a:t>09.10.2026</a:t>
             </a:fld>
             <a:endParaRPr lang="de-DE"/>
           </a:p>
@@ -871,7 +872,7 @@
           <p:cNvPr id="5" name="Fußzeilenplatzhalter 4">
             <a:extLst>
               <a:ext uri="{FF2B5EF4-FFF2-40B4-BE49-F238E27FC236}">
-                <a16:creationId xmlns:a16="http://schemas.microsoft.com/office/drawing/2014/main" id="{E9459D3D-782D-FBAF-EF15-F30110513FF4}"/>
+                <a16:creationId xmlns:a16="http://schemas.microsoft.com/office/drawing/2014/main" id="{619EF305-3EA3-6163-AC62-F72A963EB493}"/>
               </a:ext>
             </a:extLst>
           </p:cNvPr>
@@ -896,7 +897,7 @@
           <p:cNvPr id="6" name="Foliennummernplatzhalter 5">
             <a:extLst>
               <a:ext uri="{FF2B5EF4-FFF2-40B4-BE49-F238E27FC236}">
-                <a16:creationId xmlns:a16="http://schemas.microsoft.com/office/drawing/2014/main" id="{EF32F1AE-3115-74F7-CF60-14E75F7DF624}"/>
+                <a16:creationId xmlns:a16="http://schemas.microsoft.com/office/drawing/2014/main" id="{6B68CBE3-9FB8-6FBF-9B6E-3EF45E187003}"/>
               </a:ext>
             </a:extLst>
           </p:cNvPr>
@@ -912,7 +913,7 @@
           <a:bodyPr/>
           <a:lstStyle/>
           <a:p>
-            <a:fld id="{D158536F-3462-463E-B364-EF9586669638}" type="slidenum">
+            <a:fld id="{FABBB043-4E18-4521-8605-93A596019FC4}" type="slidenum">
               <a:rPr lang="de-DE" smtClean="0"/>
               <a:t>‹Nr.›</a:t>
             </a:fld>
@@ -923,7 +924,7 @@
     </p:spTree>
     <p:extLst>
       <p:ext uri="{BB962C8B-B14F-4D97-AF65-F5344CB8AC3E}">
-        <p14:creationId xmlns:p14="http://schemas.microsoft.com/office/powerpoint/2010/main" val="513032176"/>
+        <p14:creationId xmlns:p14="http://schemas.microsoft.com/office/powerpoint/2010/main" val="3100744077"/>
       </p:ext>
     </p:extLst>
   </p:cSld>
@@ -955,7 +956,7 @@
           <p:cNvPr id="2" name="Titel 1">
             <a:extLst>
               <a:ext uri="{FF2B5EF4-FFF2-40B4-BE49-F238E27FC236}">
-                <a16:creationId xmlns:a16="http://schemas.microsoft.com/office/drawing/2014/main" id="{A5197018-F2B6-1C65-DA35-4E646225C471}"/>
+                <a16:creationId xmlns:a16="http://schemas.microsoft.com/office/drawing/2014/main" id="{6671481B-AFCD-F3BB-6DBB-4BF6CE3A477B}"/>
               </a:ext>
             </a:extLst>
           </p:cNvPr>
@@ -992,7 +993,7 @@
           <p:cNvPr id="3" name="Textplatzhalter 2">
             <a:extLst>
               <a:ext uri="{FF2B5EF4-FFF2-40B4-BE49-F238E27FC236}">
-                <a16:creationId xmlns:a16="http://schemas.microsoft.com/office/drawing/2014/main" id="{72EA79E2-916B-E6E6-5BA5-2D05E51E177E}"/>
+                <a16:creationId xmlns:a16="http://schemas.microsoft.com/office/drawing/2014/main" id="{2EFD6354-12A8-C9EB-D8CB-7F3A8F8BCA1E}"/>
               </a:ext>
             </a:extLst>
           </p:cNvPr>
@@ -1117,7 +1118,7 @@
           <p:cNvPr id="4" name="Datumsplatzhalter 3">
             <a:extLst>
               <a:ext uri="{FF2B5EF4-FFF2-40B4-BE49-F238E27FC236}">
-                <a16:creationId xmlns:a16="http://schemas.microsoft.com/office/drawing/2014/main" id="{07AAF8FD-5FEB-AADC-6BCE-8D30C801D301}"/>
+                <a16:creationId xmlns:a16="http://schemas.microsoft.com/office/drawing/2014/main" id="{9B85FA9B-1B50-1430-23DB-8C7C9BE70854}"/>
               </a:ext>
             </a:extLst>
           </p:cNvPr>
@@ -1133,9 +1134,9 @@
           <a:bodyPr/>
           <a:lstStyle/>
           <a:p>
-            <a:fld id="{62A7C567-FA52-4AEF-97AB-C5FB6C1B2C2B}" type="datetimeFigureOut">
+            <a:fld id="{874CF8F7-EC0C-4A2A-935F-BEAAA7E99727}" type="datetimeFigureOut">
               <a:rPr lang="de-DE" smtClean="0"/>
-              <a:t>08.10.2026</a:t>
+              <a:t>09.10.2026</a:t>
             </a:fld>
             <a:endParaRPr lang="de-DE"/>
           </a:p>
@@ -1146,7 +1147,7 @@
           <p:cNvPr id="5" name="Fußzeilenplatzhalter 4">
             <a:extLst>
               <a:ext uri="{FF2B5EF4-FFF2-40B4-BE49-F238E27FC236}">
-                <a16:creationId xmlns:a16="http://schemas.microsoft.com/office/drawing/2014/main" id="{6127D217-7F2E-B15C-1729-9A93162125F1}"/>
+                <a16:creationId xmlns:a16="http://schemas.microsoft.com/office/drawing/2014/main" id="{ED8A2A83-B5AA-EE66-5EA4-157DE5090773}"/>
               </a:ext>
             </a:extLst>
           </p:cNvPr>
@@ -1171,7 +1172,7 @@
           <p:cNvPr id="6" name="Foliennummernplatzhalter 5">
             <a:extLst>
               <a:ext uri="{FF2B5EF4-FFF2-40B4-BE49-F238E27FC236}">
-                <a16:creationId xmlns:a16="http://schemas.microsoft.com/office/drawing/2014/main" id="{01E73FCF-F8D6-0D27-FC15-EEEE85F4BB33}"/>
+                <a16:creationId xmlns:a16="http://schemas.microsoft.com/office/drawing/2014/main" id="{1206747C-87A2-ECE6-10C7-AF565D34DFEF}"/>
               </a:ext>
             </a:extLst>
           </p:cNvPr>
@@ -1187,7 +1188,7 @@
           <a:bodyPr/>
           <a:lstStyle/>
           <a:p>
-            <a:fld id="{D158536F-3462-463E-B364-EF9586669638}" type="slidenum">
+            <a:fld id="{FABBB043-4E18-4521-8605-93A596019FC4}" type="slidenum">
               <a:rPr lang="de-DE" smtClean="0"/>
               <a:t>‹Nr.›</a:t>
             </a:fld>
@@ -1198,7 +1199,7 @@
     </p:spTree>
     <p:extLst>
       <p:ext uri="{BB962C8B-B14F-4D97-AF65-F5344CB8AC3E}">
-        <p14:creationId xmlns:p14="http://schemas.microsoft.com/office/powerpoint/2010/main" val="1392664669"/>
+        <p14:creationId xmlns:p14="http://schemas.microsoft.com/office/powerpoint/2010/main" val="2011850738"/>
       </p:ext>
     </p:extLst>
   </p:cSld>
@@ -1230,7 +1231,7 @@
           <p:cNvPr id="2" name="Titel 1">
             <a:extLst>
               <a:ext uri="{FF2B5EF4-FFF2-40B4-BE49-F238E27FC236}">
-                <a16:creationId xmlns:a16="http://schemas.microsoft.com/office/drawing/2014/main" id="{C6B09880-1839-C75E-295D-384935A50947}"/>
+                <a16:creationId xmlns:a16="http://schemas.microsoft.com/office/drawing/2014/main" id="{6786F763-9766-2CE0-C08B-2888A7529449}"/>
               </a:ext>
             </a:extLst>
           </p:cNvPr>
@@ -1258,7 +1259,7 @@
           <p:cNvPr id="3" name="Inhaltsplatzhalter 2">
             <a:extLst>
               <a:ext uri="{FF2B5EF4-FFF2-40B4-BE49-F238E27FC236}">
-                <a16:creationId xmlns:a16="http://schemas.microsoft.com/office/drawing/2014/main" id="{3E349148-0E5F-8814-859F-371DFB7AFFE6}"/>
+                <a16:creationId xmlns:a16="http://schemas.microsoft.com/office/drawing/2014/main" id="{943BD095-7E1C-3FF0-B1A9-7D00F1D2C1BA}"/>
               </a:ext>
             </a:extLst>
           </p:cNvPr>
@@ -1320,7 +1321,7 @@
           <p:cNvPr id="4" name="Inhaltsplatzhalter 3">
             <a:extLst>
               <a:ext uri="{FF2B5EF4-FFF2-40B4-BE49-F238E27FC236}">
-                <a16:creationId xmlns:a16="http://schemas.microsoft.com/office/drawing/2014/main" id="{AF534332-D2F9-11EF-4EAA-DB4732BA3FD0}"/>
+                <a16:creationId xmlns:a16="http://schemas.microsoft.com/office/drawing/2014/main" id="{EBAFCECA-CF7F-DE15-2AC5-A9C73B633EAA}"/>
               </a:ext>
             </a:extLst>
           </p:cNvPr>
@@ -1382,7 +1383,7 @@
           <p:cNvPr id="5" name="Datumsplatzhalter 4">
             <a:extLst>
               <a:ext uri="{FF2B5EF4-FFF2-40B4-BE49-F238E27FC236}">
-                <a16:creationId xmlns:a16="http://schemas.microsoft.com/office/drawing/2014/main" id="{0EF0EA7A-81F9-8D9A-A5B8-DF74362991B4}"/>
+                <a16:creationId xmlns:a16="http://schemas.microsoft.com/office/drawing/2014/main" id="{2C8FC665-FD12-6554-60C9-565166859C8D}"/>
               </a:ext>
             </a:extLst>
           </p:cNvPr>
@@ -1398,9 +1399,9 @@
           <a:bodyPr/>
           <a:lstStyle/>
           <a:p>
-            <a:fld id="{62A7C567-FA52-4AEF-97AB-C5FB6C1B2C2B}" type="datetimeFigureOut">
+            <a:fld id="{874CF8F7-EC0C-4A2A-935F-BEAAA7E99727}" type="datetimeFigureOut">
               <a:rPr lang="de-DE" smtClean="0"/>
-              <a:t>08.10.2026</a:t>
+              <a:t>09.10.2026</a:t>
             </a:fld>
             <a:endParaRPr lang="de-DE"/>
           </a:p>
@@ -1411,7 +1412,7 @@
           <p:cNvPr id="6" name="Fußzeilenplatzhalter 5">
             <a:extLst>
               <a:ext uri="{FF2B5EF4-FFF2-40B4-BE49-F238E27FC236}">
-                <a16:creationId xmlns:a16="http://schemas.microsoft.com/office/drawing/2014/main" id="{5DEE82FC-31C9-979C-8589-0F0A946B226E}"/>
+                <a16:creationId xmlns:a16="http://schemas.microsoft.com/office/drawing/2014/main" id="{BD891D90-C16B-36E2-8099-28A7C954B9FF}"/>
               </a:ext>
             </a:extLst>
           </p:cNvPr>
@@ -1436,7 +1437,7 @@
           <p:cNvPr id="7" name="Foliennummernplatzhalter 6">
             <a:extLst>
               <a:ext uri="{FF2B5EF4-FFF2-40B4-BE49-F238E27FC236}">
-                <a16:creationId xmlns:a16="http://schemas.microsoft.com/office/drawing/2014/main" id="{BB091AD6-49B5-3813-F997-05AAE68AAC4B}"/>
+                <a16:creationId xmlns:a16="http://schemas.microsoft.com/office/drawing/2014/main" id="{BB761822-1661-E7C6-92C3-6411A80E4823}"/>
               </a:ext>
             </a:extLst>
           </p:cNvPr>
@@ -1452,7 +1453,7 @@
           <a:bodyPr/>
           <a:lstStyle/>
           <a:p>
-            <a:fld id="{D158536F-3462-463E-B364-EF9586669638}" type="slidenum">
+            <a:fld id="{FABBB043-4E18-4521-8605-93A596019FC4}" type="slidenum">
               <a:rPr lang="de-DE" smtClean="0"/>
               <a:t>‹Nr.›</a:t>
             </a:fld>
@@ -1463,7 +1464,7 @@
     </p:spTree>
     <p:extLst>
       <p:ext uri="{BB962C8B-B14F-4D97-AF65-F5344CB8AC3E}">
-        <p14:creationId xmlns:p14="http://schemas.microsoft.com/office/powerpoint/2010/main" val="779614921"/>
+        <p14:creationId xmlns:p14="http://schemas.microsoft.com/office/powerpoint/2010/main" val="3265372524"/>
       </p:ext>
     </p:extLst>
   </p:cSld>
@@ -1495,7 +1496,7 @@
           <p:cNvPr id="2" name="Titel 1">
             <a:extLst>
               <a:ext uri="{FF2B5EF4-FFF2-40B4-BE49-F238E27FC236}">
-                <a16:creationId xmlns:a16="http://schemas.microsoft.com/office/drawing/2014/main" id="{81B768FC-BB2A-93DB-D0C4-3BFDE5CD4CC9}"/>
+                <a16:creationId xmlns:a16="http://schemas.microsoft.com/office/drawing/2014/main" id="{BECD21EE-BF0A-6D1A-3DDF-8FAF7CBE1571}"/>
               </a:ext>
             </a:extLst>
           </p:cNvPr>
@@ -1528,7 +1529,7 @@
           <p:cNvPr id="3" name="Textplatzhalter 2">
             <a:extLst>
               <a:ext uri="{FF2B5EF4-FFF2-40B4-BE49-F238E27FC236}">
-                <a16:creationId xmlns:a16="http://schemas.microsoft.com/office/drawing/2014/main" id="{66D8846C-4835-1349-7E4C-934F8C05BAD7}"/>
+                <a16:creationId xmlns:a16="http://schemas.microsoft.com/office/drawing/2014/main" id="{DA1C4376-6762-65C7-843D-42FDECEBBFE7}"/>
               </a:ext>
             </a:extLst>
           </p:cNvPr>
@@ -1599,7 +1600,7 @@
           <p:cNvPr id="4" name="Inhaltsplatzhalter 3">
             <a:extLst>
               <a:ext uri="{FF2B5EF4-FFF2-40B4-BE49-F238E27FC236}">
-                <a16:creationId xmlns:a16="http://schemas.microsoft.com/office/drawing/2014/main" id="{46016FDE-D0E8-F2C2-6D42-99724FB495CC}"/>
+                <a16:creationId xmlns:a16="http://schemas.microsoft.com/office/drawing/2014/main" id="{FD6B47BA-B5B7-BC2B-7134-D7A857E1AC09}"/>
               </a:ext>
             </a:extLst>
           </p:cNvPr>
@@ -1661,7 +1662,7 @@
           <p:cNvPr id="5" name="Textplatzhalter 4">
             <a:extLst>
               <a:ext uri="{FF2B5EF4-FFF2-40B4-BE49-F238E27FC236}">
-                <a16:creationId xmlns:a16="http://schemas.microsoft.com/office/drawing/2014/main" id="{D70D79F9-AC29-C1FA-236F-F7CD6195EB5A}"/>
+                <a16:creationId xmlns:a16="http://schemas.microsoft.com/office/drawing/2014/main" id="{FD861A76-FBF7-A258-CA69-E5CD5CBAC745}"/>
               </a:ext>
             </a:extLst>
           </p:cNvPr>
@@ -1732,7 +1733,7 @@
           <p:cNvPr id="6" name="Inhaltsplatzhalter 5">
             <a:extLst>
               <a:ext uri="{FF2B5EF4-FFF2-40B4-BE49-F238E27FC236}">
-                <a16:creationId xmlns:a16="http://schemas.microsoft.com/office/drawing/2014/main" id="{E160E75A-FC44-A842-0C4B-41EB8F4DD84F}"/>
+                <a16:creationId xmlns:a16="http://schemas.microsoft.com/office/drawing/2014/main" id="{3182A4DD-A268-02AC-C830-B1B42DCB8969}"/>
               </a:ext>
             </a:extLst>
           </p:cNvPr>
@@ -1794,7 +1795,7 @@
           <p:cNvPr id="7" name="Datumsplatzhalter 6">
             <a:extLst>
               <a:ext uri="{FF2B5EF4-FFF2-40B4-BE49-F238E27FC236}">
-                <a16:creationId xmlns:a16="http://schemas.microsoft.com/office/drawing/2014/main" id="{8ADCEFCA-973D-D9F3-EE84-22389EBC3BF9}"/>
+                <a16:creationId xmlns:a16="http://schemas.microsoft.com/office/drawing/2014/main" id="{03DB96D8-50DD-0F3B-31C6-56664ECDB47C}"/>
               </a:ext>
             </a:extLst>
           </p:cNvPr>
@@ -1810,9 +1811,9 @@
           <a:bodyPr/>
           <a:lstStyle/>
           <a:p>
-            <a:fld id="{62A7C567-FA52-4AEF-97AB-C5FB6C1B2C2B}" type="datetimeFigureOut">
+            <a:fld id="{874CF8F7-EC0C-4A2A-935F-BEAAA7E99727}" type="datetimeFigureOut">
               <a:rPr lang="de-DE" smtClean="0"/>
-              <a:t>08.10.2026</a:t>
+              <a:t>09.10.2026</a:t>
             </a:fld>
             <a:endParaRPr lang="de-DE"/>
           </a:p>
@@ -1823,7 +1824,7 @@
           <p:cNvPr id="8" name="Fußzeilenplatzhalter 7">
             <a:extLst>
               <a:ext uri="{FF2B5EF4-FFF2-40B4-BE49-F238E27FC236}">
-                <a16:creationId xmlns:a16="http://schemas.microsoft.com/office/drawing/2014/main" id="{769ACE42-0D64-BB10-2A4B-145143D6800E}"/>
+                <a16:creationId xmlns:a16="http://schemas.microsoft.com/office/drawing/2014/main" id="{293C3B8C-87C3-9482-E976-C036700F44BA}"/>
               </a:ext>
             </a:extLst>
           </p:cNvPr>
@@ -1848,7 +1849,7 @@
           <p:cNvPr id="9" name="Foliennummernplatzhalter 8">
             <a:extLst>
               <a:ext uri="{FF2B5EF4-FFF2-40B4-BE49-F238E27FC236}">
-                <a16:creationId xmlns:a16="http://schemas.microsoft.com/office/drawing/2014/main" id="{C258F666-E707-95EB-31DB-4CA3FB2A541C}"/>
+                <a16:creationId xmlns:a16="http://schemas.microsoft.com/office/drawing/2014/main" id="{6C23F933-A3D4-28EA-BC8D-AD8F4B500070}"/>
               </a:ext>
             </a:extLst>
           </p:cNvPr>
@@ -1864,7 +1865,7 @@
           <a:bodyPr/>
           <a:lstStyle/>
           <a:p>
-            <a:fld id="{D158536F-3462-463E-B364-EF9586669638}" type="slidenum">
+            <a:fld id="{FABBB043-4E18-4521-8605-93A596019FC4}" type="slidenum">
               <a:rPr lang="de-DE" smtClean="0"/>
               <a:t>‹Nr.›</a:t>
             </a:fld>
@@ -1875,7 +1876,7 @@
     </p:spTree>
     <p:extLst>
       <p:ext uri="{BB962C8B-B14F-4D97-AF65-F5344CB8AC3E}">
-        <p14:creationId xmlns:p14="http://schemas.microsoft.com/office/powerpoint/2010/main" val="1920423708"/>
+        <p14:creationId xmlns:p14="http://schemas.microsoft.com/office/powerpoint/2010/main" val="2425686170"/>
       </p:ext>
     </p:extLst>
   </p:cSld>
@@ -1907,7 +1908,7 @@
           <p:cNvPr id="2" name="Titel 1">
             <a:extLst>
               <a:ext uri="{FF2B5EF4-FFF2-40B4-BE49-F238E27FC236}">
-                <a16:creationId xmlns:a16="http://schemas.microsoft.com/office/drawing/2014/main" id="{21FACAFA-8D2C-CF62-D4E2-BB64151C2F7A}"/>
+                <a16:creationId xmlns:a16="http://schemas.microsoft.com/office/drawing/2014/main" id="{FCEA0598-3BA2-412B-7CBE-41FFB6E75370}"/>
               </a:ext>
             </a:extLst>
           </p:cNvPr>
@@ -1935,7 +1936,7 @@
           <p:cNvPr id="3" name="Datumsplatzhalter 2">
             <a:extLst>
               <a:ext uri="{FF2B5EF4-FFF2-40B4-BE49-F238E27FC236}">
-                <a16:creationId xmlns:a16="http://schemas.microsoft.com/office/drawing/2014/main" id="{E1C829B4-228F-A986-110C-F4CE3BC1F2DF}"/>
+                <a16:creationId xmlns:a16="http://schemas.microsoft.com/office/drawing/2014/main" id="{377B3F15-53A9-0C4C-B024-004E15C73F28}"/>
               </a:ext>
             </a:extLst>
           </p:cNvPr>
@@ -1951,9 +1952,9 @@
           <a:bodyPr/>
           <a:lstStyle/>
           <a:p>
-            <a:fld id="{62A7C567-FA52-4AEF-97AB-C5FB6C1B2C2B}" type="datetimeFigureOut">
+            <a:fld id="{874CF8F7-EC0C-4A2A-935F-BEAAA7E99727}" type="datetimeFigureOut">
               <a:rPr lang="de-DE" smtClean="0"/>
-              <a:t>08.10.2026</a:t>
+              <a:t>09.10.2026</a:t>
             </a:fld>
             <a:endParaRPr lang="de-DE"/>
           </a:p>
@@ -1964,7 +1965,7 @@
           <p:cNvPr id="4" name="Fußzeilenplatzhalter 3">
             <a:extLst>
               <a:ext uri="{FF2B5EF4-FFF2-40B4-BE49-F238E27FC236}">
-                <a16:creationId xmlns:a16="http://schemas.microsoft.com/office/drawing/2014/main" id="{C825E872-2A7E-E5FA-1CE7-992083EFC9D3}"/>
+                <a16:creationId xmlns:a16="http://schemas.microsoft.com/office/drawing/2014/main" id="{1A1270A3-6D20-A6A1-CC91-CA999E5A4604}"/>
               </a:ext>
             </a:extLst>
           </p:cNvPr>
@@ -1989,7 +1990,7 @@
           <p:cNvPr id="5" name="Foliennummernplatzhalter 4">
             <a:extLst>
               <a:ext uri="{FF2B5EF4-FFF2-40B4-BE49-F238E27FC236}">
-                <a16:creationId xmlns:a16="http://schemas.microsoft.com/office/drawing/2014/main" id="{6293A87E-57A6-06C3-9BFF-B9AB344FAB94}"/>
+                <a16:creationId xmlns:a16="http://schemas.microsoft.com/office/drawing/2014/main" id="{31FF6634-81AD-5455-DCEF-1725791CA472}"/>
               </a:ext>
             </a:extLst>
           </p:cNvPr>
@@ -2005,7 +2006,7 @@
           <a:bodyPr/>
           <a:lstStyle/>
           <a:p>
-            <a:fld id="{D158536F-3462-463E-B364-EF9586669638}" type="slidenum">
+            <a:fld id="{FABBB043-4E18-4521-8605-93A596019FC4}" type="slidenum">
               <a:rPr lang="de-DE" smtClean="0"/>
               <a:t>‹Nr.›</a:t>
             </a:fld>
@@ -2016,7 +2017,7 @@
     </p:spTree>
     <p:extLst>
       <p:ext uri="{BB962C8B-B14F-4D97-AF65-F5344CB8AC3E}">
-        <p14:creationId xmlns:p14="http://schemas.microsoft.com/office/powerpoint/2010/main" val="3790191130"/>
+        <p14:creationId xmlns:p14="http://schemas.microsoft.com/office/powerpoint/2010/main" val="1121750671"/>
       </p:ext>
     </p:extLst>
   </p:cSld>
@@ -2048,7 +2049,7 @@
           <p:cNvPr id="2" name="Datumsplatzhalter 1">
             <a:extLst>
               <a:ext uri="{FF2B5EF4-FFF2-40B4-BE49-F238E27FC236}">
-                <a16:creationId xmlns:a16="http://schemas.microsoft.com/office/drawing/2014/main" id="{EA6CDB33-5467-E5EF-5D2E-D801335553F3}"/>
+                <a16:creationId xmlns:a16="http://schemas.microsoft.com/office/drawing/2014/main" id="{5E3E5AC9-ED21-A475-1A42-AE0F7D4F0059}"/>
               </a:ext>
             </a:extLst>
           </p:cNvPr>
@@ -2064,9 +2065,9 @@
           <a:bodyPr/>
           <a:lstStyle/>
           <a:p>
-            <a:fld id="{62A7C567-FA52-4AEF-97AB-C5FB6C1B2C2B}" type="datetimeFigureOut">
+            <a:fld id="{874CF8F7-EC0C-4A2A-935F-BEAAA7E99727}" type="datetimeFigureOut">
               <a:rPr lang="de-DE" smtClean="0"/>
-              <a:t>08.10.2026</a:t>
+              <a:t>09.10.2026</a:t>
             </a:fld>
             <a:endParaRPr lang="de-DE"/>
           </a:p>
@@ -2077,7 +2078,7 @@
           <p:cNvPr id="3" name="Fußzeilenplatzhalter 2">
             <a:extLst>
               <a:ext uri="{FF2B5EF4-FFF2-40B4-BE49-F238E27FC236}">
-                <a16:creationId xmlns:a16="http://schemas.microsoft.com/office/drawing/2014/main" id="{6E63CBEE-B227-80DC-B2E2-4F98D62DD8DF}"/>
+                <a16:creationId xmlns:a16="http://schemas.microsoft.com/office/drawing/2014/main" id="{02A6FF1D-6612-B3E7-B1DA-D1C544E4EF7C}"/>
               </a:ext>
             </a:extLst>
           </p:cNvPr>
@@ -2102,7 +2103,7 @@
           <p:cNvPr id="4" name="Foliennummernplatzhalter 3">
             <a:extLst>
               <a:ext uri="{FF2B5EF4-FFF2-40B4-BE49-F238E27FC236}">
-                <a16:creationId xmlns:a16="http://schemas.microsoft.com/office/drawing/2014/main" id="{78946BA9-FC0F-6F2C-FD95-C6DE41884F6E}"/>
+                <a16:creationId xmlns:a16="http://schemas.microsoft.com/office/drawing/2014/main" id="{7E480D71-9789-418E-8D0E-0354E9C510B9}"/>
               </a:ext>
             </a:extLst>
           </p:cNvPr>
@@ -2118,7 +2119,7 @@
           <a:bodyPr/>
           <a:lstStyle/>
           <a:p>
-            <a:fld id="{D158536F-3462-463E-B364-EF9586669638}" type="slidenum">
+            <a:fld id="{FABBB043-4E18-4521-8605-93A596019FC4}" type="slidenum">
               <a:rPr lang="de-DE" smtClean="0"/>
               <a:t>‹Nr.›</a:t>
             </a:fld>
@@ -2129,7 +2130,7 @@
     </p:spTree>
     <p:extLst>
       <p:ext uri="{BB962C8B-B14F-4D97-AF65-F5344CB8AC3E}">
-        <p14:creationId xmlns:p14="http://schemas.microsoft.com/office/powerpoint/2010/main" val="1551525685"/>
+        <p14:creationId xmlns:p14="http://schemas.microsoft.com/office/powerpoint/2010/main" val="2548132576"/>
       </p:ext>
     </p:extLst>
   </p:cSld>
@@ -2161,7 +2162,7 @@
           <p:cNvPr id="2" name="Titel 1">
             <a:extLst>
               <a:ext uri="{FF2B5EF4-FFF2-40B4-BE49-F238E27FC236}">
-                <a16:creationId xmlns:a16="http://schemas.microsoft.com/office/drawing/2014/main" id="{956CE6BC-EE98-3970-9370-D47DC5513028}"/>
+                <a16:creationId xmlns:a16="http://schemas.microsoft.com/office/drawing/2014/main" id="{701C4F58-F01F-7A76-7A12-00C5201E9ECB}"/>
               </a:ext>
             </a:extLst>
           </p:cNvPr>
@@ -2198,7 +2199,7 @@
           <p:cNvPr id="3" name="Inhaltsplatzhalter 2">
             <a:extLst>
               <a:ext uri="{FF2B5EF4-FFF2-40B4-BE49-F238E27FC236}">
-                <a16:creationId xmlns:a16="http://schemas.microsoft.com/office/drawing/2014/main" id="{1E8EB831-EE02-0E2D-116B-148DFA05688F}"/>
+                <a16:creationId xmlns:a16="http://schemas.microsoft.com/office/drawing/2014/main" id="{B708EA9E-B6B3-E325-4A81-446E043D1305}"/>
               </a:ext>
             </a:extLst>
           </p:cNvPr>
@@ -2288,7 +2289,7 @@
           <p:cNvPr id="4" name="Textplatzhalter 3">
             <a:extLst>
               <a:ext uri="{FF2B5EF4-FFF2-40B4-BE49-F238E27FC236}">
-                <a16:creationId xmlns:a16="http://schemas.microsoft.com/office/drawing/2014/main" id="{C7453AD3-8CB7-D317-6443-229BE55D1939}"/>
+                <a16:creationId xmlns:a16="http://schemas.microsoft.com/office/drawing/2014/main" id="{08F41BFE-29AC-5030-9CEE-21CA393E8E93}"/>
               </a:ext>
             </a:extLst>
           </p:cNvPr>
@@ -2359,7 +2360,7 @@
           <p:cNvPr id="5" name="Datumsplatzhalter 4">
             <a:extLst>
               <a:ext uri="{FF2B5EF4-FFF2-40B4-BE49-F238E27FC236}">
-                <a16:creationId xmlns:a16="http://schemas.microsoft.com/office/drawing/2014/main" id="{821F77B9-AC4F-ED6C-8CA7-A443582E89B7}"/>
+                <a16:creationId xmlns:a16="http://schemas.microsoft.com/office/drawing/2014/main" id="{BD1DF48B-582A-1172-CCE5-E41FD086BC59}"/>
               </a:ext>
             </a:extLst>
           </p:cNvPr>
@@ -2375,9 +2376,9 @@
           <a:bodyPr/>
           <a:lstStyle/>
           <a:p>
-            <a:fld id="{62A7C567-FA52-4AEF-97AB-C5FB6C1B2C2B}" type="datetimeFigureOut">
+            <a:fld id="{874CF8F7-EC0C-4A2A-935F-BEAAA7E99727}" type="datetimeFigureOut">
               <a:rPr lang="de-DE" smtClean="0"/>
-              <a:t>08.10.2026</a:t>
+              <a:t>09.10.2026</a:t>
             </a:fld>
             <a:endParaRPr lang="de-DE"/>
           </a:p>
@@ -2388,7 +2389,7 @@
           <p:cNvPr id="6" name="Fußzeilenplatzhalter 5">
             <a:extLst>
               <a:ext uri="{FF2B5EF4-FFF2-40B4-BE49-F238E27FC236}">
-                <a16:creationId xmlns:a16="http://schemas.microsoft.com/office/drawing/2014/main" id="{931EAB53-E93F-671E-37E4-695091C90E7E}"/>
+                <a16:creationId xmlns:a16="http://schemas.microsoft.com/office/drawing/2014/main" id="{65A4129F-4D82-5598-7AC8-32D04F5CF2C5}"/>
               </a:ext>
             </a:extLst>
           </p:cNvPr>
@@ -2413,7 +2414,7 @@
           <p:cNvPr id="7" name="Foliennummernplatzhalter 6">
             <a:extLst>
               <a:ext uri="{FF2B5EF4-FFF2-40B4-BE49-F238E27FC236}">
-                <a16:creationId xmlns:a16="http://schemas.microsoft.com/office/drawing/2014/main" id="{1C125B78-EE2F-798F-036E-CFA3EE888E72}"/>
+                <a16:creationId xmlns:a16="http://schemas.microsoft.com/office/drawing/2014/main" id="{E91D9825-C92B-2991-A1DE-3E3363241D7A}"/>
               </a:ext>
             </a:extLst>
           </p:cNvPr>
@@ -2429,7 +2430,7 @@
           <a:bodyPr/>
           <a:lstStyle/>
           <a:p>
-            <a:fld id="{D158536F-3462-463E-B364-EF9586669638}" type="slidenum">
+            <a:fld id="{FABBB043-4E18-4521-8605-93A596019FC4}" type="slidenum">
               <a:rPr lang="de-DE" smtClean="0"/>
               <a:t>‹Nr.›</a:t>
             </a:fld>
@@ -2440,7 +2441,7 @@
     </p:spTree>
     <p:extLst>
       <p:ext uri="{BB962C8B-B14F-4D97-AF65-F5344CB8AC3E}">
-        <p14:creationId xmlns:p14="http://schemas.microsoft.com/office/powerpoint/2010/main" val="1654424379"/>
+        <p14:creationId xmlns:p14="http://schemas.microsoft.com/office/powerpoint/2010/main" val="436468745"/>
       </p:ext>
     </p:extLst>
   </p:cSld>
@@ -2472,7 +2473,7 @@
           <p:cNvPr id="2" name="Titel 1">
             <a:extLst>
               <a:ext uri="{FF2B5EF4-FFF2-40B4-BE49-F238E27FC236}">
-                <a16:creationId xmlns:a16="http://schemas.microsoft.com/office/drawing/2014/main" id="{347B83E4-E523-9909-D94E-EFFFF2FE5EA7}"/>
+                <a16:creationId xmlns:a16="http://schemas.microsoft.com/office/drawing/2014/main" id="{40D0A36C-8D63-4501-B1DA-C242140F2459}"/>
               </a:ext>
             </a:extLst>
           </p:cNvPr>
@@ -2509,7 +2510,7 @@
           <p:cNvPr id="3" name="Bildplatzhalter 2">
             <a:extLst>
               <a:ext uri="{FF2B5EF4-FFF2-40B4-BE49-F238E27FC236}">
-                <a16:creationId xmlns:a16="http://schemas.microsoft.com/office/drawing/2014/main" id="{7945846E-55A5-E006-3C1F-A76BFFD2B23C}"/>
+                <a16:creationId xmlns:a16="http://schemas.microsoft.com/office/drawing/2014/main" id="{B87074B3-1410-FF5B-34C8-0FE201720852}"/>
               </a:ext>
             </a:extLst>
           </p:cNvPr>
@@ -2576,7 +2577,7 @@
           <p:cNvPr id="4" name="Textplatzhalter 3">
             <a:extLst>
               <a:ext uri="{FF2B5EF4-FFF2-40B4-BE49-F238E27FC236}">
-                <a16:creationId xmlns:a16="http://schemas.microsoft.com/office/drawing/2014/main" id="{8D5D68F5-3803-8C76-7F66-BD70B39B112D}"/>
+                <a16:creationId xmlns:a16="http://schemas.microsoft.com/office/drawing/2014/main" id="{E48E87AF-4AE8-229B-342E-0CBA7D4C7F72}"/>
               </a:ext>
             </a:extLst>
           </p:cNvPr>
@@ -2647,7 +2648,7 @@
           <p:cNvPr id="5" name="Datumsplatzhalter 4">
             <a:extLst>
               <a:ext uri="{FF2B5EF4-FFF2-40B4-BE49-F238E27FC236}">
-                <a16:creationId xmlns:a16="http://schemas.microsoft.com/office/drawing/2014/main" id="{30FD81D7-AB90-5A5C-13F0-3F37EAF38601}"/>
+                <a16:creationId xmlns:a16="http://schemas.microsoft.com/office/drawing/2014/main" id="{90534E39-838E-D609-D955-AC2A64298439}"/>
               </a:ext>
             </a:extLst>
           </p:cNvPr>
@@ -2663,9 +2664,9 @@
           <a:bodyPr/>
           <a:lstStyle/>
           <a:p>
-            <a:fld id="{62A7C567-FA52-4AEF-97AB-C5FB6C1B2C2B}" type="datetimeFigureOut">
+            <a:fld id="{874CF8F7-EC0C-4A2A-935F-BEAAA7E99727}" type="datetimeFigureOut">
               <a:rPr lang="de-DE" smtClean="0"/>
-              <a:t>08.10.2026</a:t>
+              <a:t>09.10.2026</a:t>
             </a:fld>
             <a:endParaRPr lang="de-DE"/>
           </a:p>
@@ -2676,7 +2677,7 @@
           <p:cNvPr id="6" name="Fußzeilenplatzhalter 5">
             <a:extLst>
               <a:ext uri="{FF2B5EF4-FFF2-40B4-BE49-F238E27FC236}">
-                <a16:creationId xmlns:a16="http://schemas.microsoft.com/office/drawing/2014/main" id="{76FBC56F-E68A-BA37-D165-3FCF8C79F190}"/>
+                <a16:creationId xmlns:a16="http://schemas.microsoft.com/office/drawing/2014/main" id="{1B341C18-6973-DC79-0ACC-6A2098482359}"/>
               </a:ext>
             </a:extLst>
           </p:cNvPr>
@@ -2701,7 +2702,7 @@
           <p:cNvPr id="7" name="Foliennummernplatzhalter 6">
             <a:extLst>
               <a:ext uri="{FF2B5EF4-FFF2-40B4-BE49-F238E27FC236}">
-                <a16:creationId xmlns:a16="http://schemas.microsoft.com/office/drawing/2014/main" id="{2D1AE209-5713-3FF8-D6C1-129A5ACAB6A0}"/>
+                <a16:creationId xmlns:a16="http://schemas.microsoft.com/office/drawing/2014/main" id="{87CF4941-689E-708F-4DD0-EE4E50A64DF4}"/>
               </a:ext>
             </a:extLst>
           </p:cNvPr>
@@ -2717,7 +2718,7 @@
           <a:bodyPr/>
           <a:lstStyle/>
           <a:p>
-            <a:fld id="{D158536F-3462-463E-B364-EF9586669638}" type="slidenum">
+            <a:fld id="{FABBB043-4E18-4521-8605-93A596019FC4}" type="slidenum">
               <a:rPr lang="de-DE" smtClean="0"/>
               <a:t>‹Nr.›</a:t>
             </a:fld>
@@ -2728,7 +2729,7 @@
     </p:spTree>
     <p:extLst>
       <p:ext uri="{BB962C8B-B14F-4D97-AF65-F5344CB8AC3E}">
-        <p14:creationId xmlns:p14="http://schemas.microsoft.com/office/powerpoint/2010/main" val="926424030"/>
+        <p14:creationId xmlns:p14="http://schemas.microsoft.com/office/powerpoint/2010/main" val="3520459671"/>
       </p:ext>
     </p:extLst>
   </p:cSld>
@@ -2765,7 +2766,7 @@
           <p:cNvPr id="2" name="Titelplatzhalter 1">
             <a:extLst>
               <a:ext uri="{FF2B5EF4-FFF2-40B4-BE49-F238E27FC236}">
-                <a16:creationId xmlns:a16="http://schemas.microsoft.com/office/drawing/2014/main" id="{4DDC00A6-5662-123C-2E82-501F79C2244C}"/>
+                <a16:creationId xmlns:a16="http://schemas.microsoft.com/office/drawing/2014/main" id="{478BB056-F5C5-B767-BE0D-F31570FDD735}"/>
               </a:ext>
             </a:extLst>
           </p:cNvPr>
@@ -2803,7 +2804,7 @@
           <p:cNvPr id="3" name="Textplatzhalter 2">
             <a:extLst>
               <a:ext uri="{FF2B5EF4-FFF2-40B4-BE49-F238E27FC236}">
-                <a16:creationId xmlns:a16="http://schemas.microsoft.com/office/drawing/2014/main" id="{4CF76787-7F86-BE3D-FCD7-87D0EC2CF273}"/>
+                <a16:creationId xmlns:a16="http://schemas.microsoft.com/office/drawing/2014/main" id="{0CCE2C37-2C96-1F56-6A11-A3CC5AA44D4F}"/>
               </a:ext>
             </a:extLst>
           </p:cNvPr>
@@ -2870,7 +2871,7 @@
           <p:cNvPr id="4" name="Datumsplatzhalter 3">
             <a:extLst>
               <a:ext uri="{FF2B5EF4-FFF2-40B4-BE49-F238E27FC236}">
-                <a16:creationId xmlns:a16="http://schemas.microsoft.com/office/drawing/2014/main" id="{5D3A3F85-A357-CBC1-8F38-B792873F141A}"/>
+                <a16:creationId xmlns:a16="http://schemas.microsoft.com/office/drawing/2014/main" id="{8875963F-DD4A-A727-B14B-E6895B250257}"/>
               </a:ext>
             </a:extLst>
           </p:cNvPr>
@@ -2904,9 +2905,9 @@
             </a:lvl1pPr>
           </a:lstStyle>
           <a:p>
-            <a:fld id="{62A7C567-FA52-4AEF-97AB-C5FB6C1B2C2B}" type="datetimeFigureOut">
+            <a:fld id="{874CF8F7-EC0C-4A2A-935F-BEAAA7E99727}" type="datetimeFigureOut">
               <a:rPr lang="de-DE" smtClean="0"/>
-              <a:t>08.10.2026</a:t>
+              <a:t>09.10.2026</a:t>
             </a:fld>
             <a:endParaRPr lang="de-DE"/>
           </a:p>
@@ -2917,7 +2918,7 @@
           <p:cNvPr id="5" name="Fußzeilenplatzhalter 4">
             <a:extLst>
               <a:ext uri="{FF2B5EF4-FFF2-40B4-BE49-F238E27FC236}">
-                <a16:creationId xmlns:a16="http://schemas.microsoft.com/office/drawing/2014/main" id="{0A1BF149-5B9B-4593-B17B-F146F03B5274}"/>
+                <a16:creationId xmlns:a16="http://schemas.microsoft.com/office/drawing/2014/main" id="{BD67B17B-059A-4F9B-1A63-4C6D690E6CB6}"/>
               </a:ext>
             </a:extLst>
           </p:cNvPr>
@@ -2960,7 +2961,7 @@
           <p:cNvPr id="6" name="Foliennummernplatzhalter 5">
             <a:extLst>
               <a:ext uri="{FF2B5EF4-FFF2-40B4-BE49-F238E27FC236}">
-                <a16:creationId xmlns:a16="http://schemas.microsoft.com/office/drawing/2014/main" id="{C8BE034B-2D42-44A8-59BF-27EB0728348F}"/>
+                <a16:creationId xmlns:a16="http://schemas.microsoft.com/office/drawing/2014/main" id="{63484C0F-5F06-DE1F-E9A3-A0A60D65EBAD}"/>
               </a:ext>
             </a:extLst>
           </p:cNvPr>
@@ -2994,7 +2995,7 @@
             </a:lvl1pPr>
           </a:lstStyle>
           <a:p>
-            <a:fld id="{D158536F-3462-463E-B364-EF9586669638}" type="slidenum">
+            <a:fld id="{FABBB043-4E18-4521-8605-93A596019FC4}" type="slidenum">
               <a:rPr lang="de-DE" smtClean="0"/>
               <a:t>‹Nr.›</a:t>
             </a:fld>
@@ -3005,7 +3006,7 @@
     </p:spTree>
     <p:extLst>
       <p:ext uri="{BB962C8B-B14F-4D97-AF65-F5344CB8AC3E}">
-        <p14:creationId xmlns:p14="http://schemas.microsoft.com/office/powerpoint/2010/main" val="1944433110"/>
+        <p14:creationId xmlns:p14="http://schemas.microsoft.com/office/powerpoint/2010/main" val="2905838582"/>
       </p:ext>
     </p:extLst>
   </p:cSld>
@@ -3328,7 +3329,7 @@
           <p:cNvPr id="2" name="Textfeld 1">
             <a:extLst>
               <a:ext uri="{FF2B5EF4-FFF2-40B4-BE49-F238E27FC236}">
-                <a16:creationId xmlns:a16="http://schemas.microsoft.com/office/drawing/2014/main" id="{42AD318D-D54D-B44B-72CE-C83AC99AA62D}"/>
+                <a16:creationId xmlns:a16="http://schemas.microsoft.com/office/drawing/2014/main" id="{A811F641-1153-94C0-967A-D48FF98671A8}"/>
               </a:ext>
             </a:extLst>
           </p:cNvPr>
@@ -3377,7 +3378,7 @@
           <p:cNvPr id="3" name="Textfeld 2">
             <a:extLst>
               <a:ext uri="{FF2B5EF4-FFF2-40B4-BE49-F238E27FC236}">
-                <a16:creationId xmlns:a16="http://schemas.microsoft.com/office/drawing/2014/main" id="{B0421E81-FD56-275B-56F3-D90FA3FAE902}"/>
+                <a16:creationId xmlns:a16="http://schemas.microsoft.com/office/drawing/2014/main" id="{BA7D8D57-8F7A-C29C-674D-DD3B99755930}"/>
               </a:ext>
             </a:extLst>
           </p:cNvPr>
@@ -3446,7 +3447,7 @@
           <p:cNvPr id="4" name="Textfeld 3">
             <a:extLst>
               <a:ext uri="{FF2B5EF4-FFF2-40B4-BE49-F238E27FC236}">
-                <a16:creationId xmlns:a16="http://schemas.microsoft.com/office/drawing/2014/main" id="{5C74C832-573D-2C0E-1356-6AAE56CC07D2}"/>
+                <a16:creationId xmlns:a16="http://schemas.microsoft.com/office/drawing/2014/main" id="{03D96377-7A59-3FE5-4298-80CF2412F07B}"/>
               </a:ext>
             </a:extLst>
           </p:cNvPr>
@@ -3491,7 +3492,7 @@
           <p:cNvPr id="5" name="Textfeld 4">
             <a:extLst>
               <a:ext uri="{FF2B5EF4-FFF2-40B4-BE49-F238E27FC236}">
-                <a16:creationId xmlns:a16="http://schemas.microsoft.com/office/drawing/2014/main" id="{055A885C-102E-9CAE-8571-3DBF934AACE8}"/>
+                <a16:creationId xmlns:a16="http://schemas.microsoft.com/office/drawing/2014/main" id="{991B7478-ED13-A550-825C-F585B17BE86D}"/>
               </a:ext>
             </a:extLst>
           </p:cNvPr>
@@ -3534,7 +3535,7 @@
           <p:cNvPr id="6" name="Textfeld 5">
             <a:extLst>
               <a:ext uri="{FF2B5EF4-FFF2-40B4-BE49-F238E27FC236}">
-                <a16:creationId xmlns:a16="http://schemas.microsoft.com/office/drawing/2014/main" id="{6E1E312E-715E-607B-33AF-F82B4A1641E6}"/>
+                <a16:creationId xmlns:a16="http://schemas.microsoft.com/office/drawing/2014/main" id="{DA36C5CB-8D83-6CC9-5107-73F4565257C9}"/>
               </a:ext>
             </a:extLst>
           </p:cNvPr>
@@ -3579,7 +3580,7 @@
           <p:cNvPr id="7" name="Textfeld 6">
             <a:extLst>
               <a:ext uri="{FF2B5EF4-FFF2-40B4-BE49-F238E27FC236}">
-                <a16:creationId xmlns:a16="http://schemas.microsoft.com/office/drawing/2014/main" id="{FDF4771D-BEC5-5FF5-86D1-5145A1EAAC90}"/>
+                <a16:creationId xmlns:a16="http://schemas.microsoft.com/office/drawing/2014/main" id="{3C4F9A0A-D345-D226-3D04-7FC086CE54A4}"/>
               </a:ext>
             </a:extLst>
           </p:cNvPr>
@@ -3623,7 +3624,7 @@
     </p:spTree>
     <p:extLst>
       <p:ext uri="{BB962C8B-B14F-4D97-AF65-F5344CB8AC3E}">
-        <p14:creationId xmlns:p14="http://schemas.microsoft.com/office/powerpoint/2010/main" val="994955270"/>
+        <p14:creationId xmlns:p14="http://schemas.microsoft.com/office/powerpoint/2010/main" val="2936590749"/>
       </p:ext>
     </p:extLst>
   </p:cSld>
@@ -3655,7 +3656,7 @@
           <p:cNvPr id="2" name="Textfeld 1">
             <a:extLst>
               <a:ext uri="{FF2B5EF4-FFF2-40B4-BE49-F238E27FC236}">
-                <a16:creationId xmlns:a16="http://schemas.microsoft.com/office/drawing/2014/main" id="{20099812-8D12-C55C-EFEE-CE80094EF50B}"/>
+                <a16:creationId xmlns:a16="http://schemas.microsoft.com/office/drawing/2014/main" id="{DA5CFDA7-6493-7259-127D-F49C1016ED51}"/>
               </a:ext>
             </a:extLst>
           </p:cNvPr>
@@ -3697,7 +3698,7 @@
           <p:cNvPr id="3" name="Textfeld 2">
             <a:extLst>
               <a:ext uri="{FF2B5EF4-FFF2-40B4-BE49-F238E27FC236}">
-                <a16:creationId xmlns:a16="http://schemas.microsoft.com/office/drawing/2014/main" id="{C54AE85A-1D69-6A7D-A96B-5100906B72B1}"/>
+                <a16:creationId xmlns:a16="http://schemas.microsoft.com/office/drawing/2014/main" id="{0ACDE9D5-8495-77D1-8849-7A48E6B3C05B}"/>
               </a:ext>
             </a:extLst>
           </p:cNvPr>
@@ -3739,7 +3740,7 @@
           <p:cNvPr id="4" name="Textfeld 3">
             <a:extLst>
               <a:ext uri="{FF2B5EF4-FFF2-40B4-BE49-F238E27FC236}">
-                <a16:creationId xmlns:a16="http://schemas.microsoft.com/office/drawing/2014/main" id="{8453B3B7-C0A0-D50A-4A2B-3215DD4FEF45}"/>
+                <a16:creationId xmlns:a16="http://schemas.microsoft.com/office/drawing/2014/main" id="{62806C1E-3AA8-4D7E-EC70-7B1A6F9BD1D4}"/>
               </a:ext>
             </a:extLst>
           </p:cNvPr>
@@ -3779,7 +3780,7 @@
           <p:cNvPr id="5" name="Textfeld 4">
             <a:extLst>
               <a:ext uri="{FF2B5EF4-FFF2-40B4-BE49-F238E27FC236}">
-                <a16:creationId xmlns:a16="http://schemas.microsoft.com/office/drawing/2014/main" id="{A14AC594-E87C-9D70-FA48-608CC6C3E2E3}"/>
+                <a16:creationId xmlns:a16="http://schemas.microsoft.com/office/drawing/2014/main" id="{FF72B107-0D70-7107-97BA-5272BC7E60EB}"/>
               </a:ext>
             </a:extLst>
           </p:cNvPr>
@@ -3836,7 +3837,7 @@
     </p:spTree>
     <p:extLst>
       <p:ext uri="{BB962C8B-B14F-4D97-AF65-F5344CB8AC3E}">
-        <p14:creationId xmlns:p14="http://schemas.microsoft.com/office/powerpoint/2010/main" val="1823382513"/>
+        <p14:creationId xmlns:p14="http://schemas.microsoft.com/office/powerpoint/2010/main" val="688370002"/>
       </p:ext>
     </p:extLst>
   </p:cSld>
@@ -3868,7 +3869,300 @@
           <p:cNvPr id="2" name="Textfeld 1">
             <a:extLst>
               <a:ext uri="{FF2B5EF4-FFF2-40B4-BE49-F238E27FC236}">
-                <a16:creationId xmlns:a16="http://schemas.microsoft.com/office/drawing/2014/main" id="{2CEC8915-0FE5-AADB-0429-50BDB938DC36}"/>
+                <a16:creationId xmlns:a16="http://schemas.microsoft.com/office/drawing/2014/main" id="{0325BEEF-730D-B035-E472-433BCB4B7427}"/>
+              </a:ext>
+            </a:extLst>
+          </p:cNvPr>
+          <p:cNvSpPr txBox="1"/>
+          <p:nvPr/>
+        </p:nvSpPr>
+        <p:spPr>
+          <a:xfrm>
+            <a:off x="508000" y="254000"/>
+            <a:ext cx="4433906" cy="923330"/>
+          </a:xfrm>
+          <a:prstGeom prst="rect">
+            <a:avLst/>
+          </a:prstGeom>
+          <a:noFill/>
+        </p:spPr>
+        <p:txBody>
+          <a:bodyPr vert="horz" wrap="none" rtlCol="0">
+            <a:spAutoFit/>
+          </a:bodyPr>
+          <a:lstStyle/>
+          <a:p>
+            <a:r>
+              <a:rPr lang="de-DE" sz="5400" b="1">
+                <a:solidFill>
+                  <a:srgbClr val="F0C83C"/>
+                </a:solidFill>
+                <a:effectLst>
+                  <a:innerShdw blurRad="38100" dist="53882" dir="2700000">
+                    <a:srgbClr val="783C00"/>
+                  </a:innerShdw>
+                </a:effectLst>
+                <a:latin typeface="Aptos" panose="020B0004020202020204" pitchFamily="34" charset="0"/>
+              </a:rPr>
+              <a:t>Inner shadow</a:t>
+            </a:r>
+          </a:p>
+        </p:txBody>
+      </p:sp>
+      <p:sp>
+        <p:nvSpPr>
+          <p:cNvPr id="3" name="Textfeld 2">
+            <a:extLst>
+              <a:ext uri="{FF2B5EF4-FFF2-40B4-BE49-F238E27FC236}">
+                <a16:creationId xmlns:a16="http://schemas.microsoft.com/office/drawing/2014/main" id="{A2FB9FF3-6695-25B6-83DB-95E63AAC07B5}"/>
+              </a:ext>
+            </a:extLst>
+          </p:cNvPr>
+          <p:cNvSpPr txBox="1"/>
+          <p:nvPr/>
+        </p:nvSpPr>
+        <p:spPr>
+          <a:xfrm>
+            <a:off x="6350000" y="254000"/>
+            <a:ext cx="4953920" cy="923330"/>
+          </a:xfrm>
+          <a:prstGeom prst="rect">
+            <a:avLst/>
+          </a:prstGeom>
+          <a:noFill/>
+        </p:spPr>
+        <p:txBody>
+          <a:bodyPr vert="horz" wrap="none" rtlCol="0">
+            <a:spAutoFit/>
+          </a:bodyPr>
+          <a:lstStyle/>
+          <a:p>
+            <a:r>
+              <a:rPr lang="de-DE" sz="5400" b="1">
+                <a:effectLst>
+                  <a:outerShdw blurRad="25400" dist="91581" dir="19578602" sx="110000" sy="110000" rotWithShape="0">
+                    <a:srgbClr val="0050A0">
+                      <a:alpha val="60000"/>
+                    </a:srgbClr>
+                  </a:outerShdw>
+                </a:effectLst>
+                <a:latin typeface="Aptos" panose="020B0004020202020204" pitchFamily="34" charset="0"/>
+              </a:rPr>
+              <a:t>Scaled shadow</a:t>
+            </a:r>
+          </a:p>
+        </p:txBody>
+      </p:sp>
+      <p:sp>
+        <p:nvSpPr>
+          <p:cNvPr id="4" name="Textfeld 3">
+            <a:extLst>
+              <a:ext uri="{FF2B5EF4-FFF2-40B4-BE49-F238E27FC236}">
+                <a16:creationId xmlns:a16="http://schemas.microsoft.com/office/drawing/2014/main" id="{FCCA00E3-D34C-8E52-BAB4-B46B39A24A74}"/>
+              </a:ext>
+            </a:extLst>
+          </p:cNvPr>
+          <p:cNvSpPr txBox="1"/>
+          <p:nvPr/>
+        </p:nvSpPr>
+        <p:spPr>
+          <a:xfrm>
+            <a:off x="508000" y="2032000"/>
+            <a:ext cx="4085414" cy="923330"/>
+          </a:xfrm>
+          <a:prstGeom prst="rect">
+            <a:avLst/>
+          </a:prstGeom>
+          <a:noFill/>
+        </p:spPr>
+        <p:txBody>
+          <a:bodyPr vert="horz" wrap="none" rtlCol="0">
+            <a:spAutoFit/>
+          </a:bodyPr>
+          <a:lstStyle/>
+          <a:p>
+            <a:r>
+              <a:rPr lang="de-DE" sz="5400" b="1">
+                <a:effectLst>
+                  <a:outerShdw blurRad="177800" dist="101600" dir="5400000" rotWithShape="0">
+                    <a:srgbClr val="000000">
+                      <a:alpha val="70000"/>
+                    </a:srgbClr>
+                  </a:outerShdw>
+                </a:effectLst>
+                <a:latin typeface="Aptos" panose="020B0004020202020204" pitchFamily="34" charset="0"/>
+              </a:rPr>
+              <a:t>Soft shadow</a:t>
+            </a:r>
+          </a:p>
+        </p:txBody>
+      </p:sp>
+      <p:sp>
+        <p:nvSpPr>
+          <p:cNvPr id="5" name="Textfeld 4">
+            <a:extLst>
+              <a:ext uri="{FF2B5EF4-FFF2-40B4-BE49-F238E27FC236}">
+                <a16:creationId xmlns:a16="http://schemas.microsoft.com/office/drawing/2014/main" id="{9A603AE2-D37C-1BBC-9971-C794A2432637}"/>
+              </a:ext>
+            </a:extLst>
+          </p:cNvPr>
+          <p:cNvSpPr txBox="1"/>
+          <p:nvPr/>
+        </p:nvSpPr>
+        <p:spPr>
+          <a:xfrm>
+            <a:off x="6350000" y="2032000"/>
+            <a:ext cx="3099566" cy="923330"/>
+          </a:xfrm>
+          <a:prstGeom prst="rect">
+            <a:avLst/>
+          </a:prstGeom>
+          <a:noFill/>
+        </p:spPr>
+        <p:txBody>
+          <a:bodyPr vert="horz" wrap="none" rtlCol="0">
+            <a:spAutoFit/>
+          </a:bodyPr>
+          <a:lstStyle/>
+          <a:p>
+            <a:r>
+              <a:rPr lang="de-DE" sz="5400" b="1">
+                <a:solidFill>
+                  <a:srgbClr val="FFFFFF"/>
+                </a:solidFill>
+                <a:effectLst>
+                  <a:glow rad="177800">
+                    <a:srgbClr val="285ADC">
+                      <a:alpha val="50000"/>
+                    </a:srgbClr>
+                  </a:glow>
+                </a:effectLst>
+                <a:latin typeface="Aptos" panose="020B0004020202020204" pitchFamily="34" charset="0"/>
+              </a:rPr>
+              <a:t>Soft glow</a:t>
+            </a:r>
+          </a:p>
+        </p:txBody>
+      </p:sp>
+      <p:sp>
+        <p:nvSpPr>
+          <p:cNvPr id="6" name="Textfeld 5">
+            <a:extLst>
+              <a:ext uri="{FF2B5EF4-FFF2-40B4-BE49-F238E27FC236}">
+                <a16:creationId xmlns:a16="http://schemas.microsoft.com/office/drawing/2014/main" id="{172076B7-0556-2E2B-B5FE-22037F632A4C}"/>
+              </a:ext>
+            </a:extLst>
+          </p:cNvPr>
+          <p:cNvSpPr txBox="1"/>
+          <p:nvPr/>
+        </p:nvSpPr>
+        <p:spPr>
+          <a:xfrm>
+            <a:off x="508000" y="3810000"/>
+            <a:ext cx="4403257" cy="830997"/>
+          </a:xfrm>
+          <a:prstGeom prst="rect">
+            <a:avLst/>
+          </a:prstGeom>
+          <a:noFill/>
+        </p:spPr>
+        <p:txBody>
+          <a:bodyPr vert="horz" wrap="none" rtlCol="0">
+            <a:spAutoFit/>
+          </a:bodyPr>
+          <a:lstStyle/>
+          <a:p>
+            <a:r>
+              <a:rPr lang="de-DE" sz="4800" b="1">
+                <a:effectLst>
+                  <a:reflection blurRad="6350" stA="55000" endA="300" endPos="45500" dir="5400000" sy="-100000" algn="bl" rotWithShape="0"/>
+                </a:effectLst>
+                <a:latin typeface="Aptos" panose="020B0004020202020204" pitchFamily="34" charset="0"/>
+              </a:rPr>
+              <a:t>Tight reflection</a:t>
+            </a:r>
+          </a:p>
+        </p:txBody>
+      </p:sp>
+      <p:sp>
+        <p:nvSpPr>
+          <p:cNvPr id="7" name="Textfeld 6">
+            <a:extLst>
+              <a:ext uri="{FF2B5EF4-FFF2-40B4-BE49-F238E27FC236}">
+                <a16:creationId xmlns:a16="http://schemas.microsoft.com/office/drawing/2014/main" id="{0B0DDFCC-4916-AA1A-6CC9-08845546DED9}"/>
+              </a:ext>
+            </a:extLst>
+          </p:cNvPr>
+          <p:cNvSpPr txBox="1"/>
+          <p:nvPr/>
+        </p:nvSpPr>
+        <p:spPr>
+          <a:xfrm>
+            <a:off x="6350000" y="3810000"/>
+            <a:ext cx="4215706" cy="830997"/>
+          </a:xfrm>
+          <a:prstGeom prst="rect">
+            <a:avLst/>
+          </a:prstGeom>
+          <a:noFill/>
+        </p:spPr>
+        <p:txBody>
+          <a:bodyPr vert="horz" wrap="none" rtlCol="0">
+            <a:spAutoFit/>
+          </a:bodyPr>
+          <a:lstStyle/>
+          <a:p>
+            <a:r>
+              <a:rPr lang="de-DE" sz="4800" b="1">
+                <a:solidFill>
+                  <a:srgbClr val="A01E3C"/>
+                </a:solidFill>
+                <a:effectLst>
+                  <a:reflection blurRad="6350" stA="60000" endA="900" endPos="60000" dist="60007" dir="5400000" sy="-100000" algn="bl" rotWithShape="0"/>
+                </a:effectLst>
+                <a:latin typeface="Aptos" panose="020B0004020202020204" pitchFamily="34" charset="0"/>
+              </a:rPr>
+              <a:t>Half reflection</a:t>
+            </a:r>
+          </a:p>
+        </p:txBody>
+      </p:sp>
+    </p:spTree>
+    <p:extLst>
+      <p:ext uri="{BB962C8B-B14F-4D97-AF65-F5344CB8AC3E}">
+        <p14:creationId xmlns:p14="http://schemas.microsoft.com/office/powerpoint/2010/main" val="3810267761"/>
+      </p:ext>
+    </p:extLst>
+  </p:cSld>
+  <p:clrMapOvr>
+    <a:masterClrMapping/>
+  </p:clrMapOvr>
+</p:sld>
+</file>
+
+<file path=ppt/slides/slide4.xml><?xml version="1.0" encoding="utf-8"?>
+<p:sld xmlns:a="http://schemas.openxmlformats.org/drawingml/2006/main" xmlns:r="http://schemas.openxmlformats.org/officeDocument/2006/relationships" xmlns:p="http://schemas.openxmlformats.org/presentationml/2006/main">
+  <p:cSld>
+    <p:spTree>
+      <p:nvGrpSpPr>
+        <p:cNvPr id="1" name=""/>
+        <p:cNvGrpSpPr/>
+        <p:nvPr/>
+      </p:nvGrpSpPr>
+      <p:grpSpPr>
+        <a:xfrm>
+          <a:off x="0" y="0"/>
+          <a:ext cx="0" cy="0"/>
+          <a:chOff x="0" y="0"/>
+          <a:chExt cx="0" cy="0"/>
+        </a:xfrm>
+      </p:grpSpPr>
+      <p:sp>
+        <p:nvSpPr>
+          <p:cNvPr id="2" name="Textfeld 1">
+            <a:extLst>
+              <a:ext uri="{FF2B5EF4-FFF2-40B4-BE49-F238E27FC236}">
+                <a16:creationId xmlns:a16="http://schemas.microsoft.com/office/drawing/2014/main" id="{847EBDF6-0240-5751-701B-B3D184A15912}"/>
               </a:ext>
             </a:extLst>
           </p:cNvPr>
@@ -3910,7 +4204,7 @@
           <p:cNvPr id="3" name="Textfeld 2">
             <a:extLst>
               <a:ext uri="{FF2B5EF4-FFF2-40B4-BE49-F238E27FC236}">
-                <a16:creationId xmlns:a16="http://schemas.microsoft.com/office/drawing/2014/main" id="{03EE378F-F179-7E8E-5CC1-90111D7E60A0}"/>
+                <a16:creationId xmlns:a16="http://schemas.microsoft.com/office/drawing/2014/main" id="{97D5A49C-B92F-561D-6F4F-BA1E02AA51B7}"/>
               </a:ext>
             </a:extLst>
           </p:cNvPr>
@@ -3952,7 +4246,7 @@
           <p:cNvPr id="4" name="Textfeld 3">
             <a:extLst>
               <a:ext uri="{FF2B5EF4-FFF2-40B4-BE49-F238E27FC236}">
-                <a16:creationId xmlns:a16="http://schemas.microsoft.com/office/drawing/2014/main" id="{EBE7F31F-289B-DF29-8A8D-78C32BDEC578}"/>
+                <a16:creationId xmlns:a16="http://schemas.microsoft.com/office/drawing/2014/main" id="{6AC42EE9-5A39-BCE6-2775-013AD17A4145}"/>
               </a:ext>
             </a:extLst>
           </p:cNvPr>
@@ -3994,7 +4288,7 @@
           <p:cNvPr id="5" name="Textfeld 4">
             <a:extLst>
               <a:ext uri="{FF2B5EF4-FFF2-40B4-BE49-F238E27FC236}">
-                <a16:creationId xmlns:a16="http://schemas.microsoft.com/office/drawing/2014/main" id="{67EB155D-3CB0-8231-6EA7-71A1E0482B02}"/>
+                <a16:creationId xmlns:a16="http://schemas.microsoft.com/office/drawing/2014/main" id="{CCC7A335-4774-659F-6AAF-C963F5C13DAD}"/>
               </a:ext>
             </a:extLst>
           </p:cNvPr>
@@ -4036,7 +4330,7 @@
           <p:cNvPr id="6" name="Textfeld 5">
             <a:extLst>
               <a:ext uri="{FF2B5EF4-FFF2-40B4-BE49-F238E27FC236}">
-                <a16:creationId xmlns:a16="http://schemas.microsoft.com/office/drawing/2014/main" id="{C08B2762-98C5-6CE5-D94D-5B2562E803E8}"/>
+                <a16:creationId xmlns:a16="http://schemas.microsoft.com/office/drawing/2014/main" id="{FFE0D740-AC88-F0BE-9FD0-B3BED92E76C9}"/>
               </a:ext>
             </a:extLst>
           </p:cNvPr>
@@ -4078,7 +4372,7 @@
           <p:cNvPr id="7" name="Textfeld 6">
             <a:extLst>
               <a:ext uri="{FF2B5EF4-FFF2-40B4-BE49-F238E27FC236}">
-                <a16:creationId xmlns:a16="http://schemas.microsoft.com/office/drawing/2014/main" id="{30640411-969E-093C-24E5-9F9B88510FBA}"/>
+                <a16:creationId xmlns:a16="http://schemas.microsoft.com/office/drawing/2014/main" id="{15D4CB85-B392-E5B2-8ECF-00B2C61657A5}"/>
               </a:ext>
             </a:extLst>
           </p:cNvPr>
@@ -4120,7 +4414,7 @@
           <p:cNvPr id="8" name="Textfeld 7">
             <a:extLst>
               <a:ext uri="{FF2B5EF4-FFF2-40B4-BE49-F238E27FC236}">
-                <a16:creationId xmlns:a16="http://schemas.microsoft.com/office/drawing/2014/main" id="{8B54B1C3-8744-6CEE-A24E-EC5ECD7B5786}"/>
+                <a16:creationId xmlns:a16="http://schemas.microsoft.com/office/drawing/2014/main" id="{F95E1D7C-BE52-D32C-FBD9-8A99B7BDB1CD}"/>
               </a:ext>
             </a:extLst>
           </p:cNvPr>
@@ -4162,7 +4456,7 @@
           <p:cNvPr id="9" name="Textfeld 8">
             <a:extLst>
               <a:ext uri="{FF2B5EF4-FFF2-40B4-BE49-F238E27FC236}">
-                <a16:creationId xmlns:a16="http://schemas.microsoft.com/office/drawing/2014/main" id="{0AE62574-273B-81E6-0F42-1E89E56F6F05}"/>
+                <a16:creationId xmlns:a16="http://schemas.microsoft.com/office/drawing/2014/main" id="{E018E954-8273-E985-4CB8-A622E752DD87}"/>
               </a:ext>
             </a:extLst>
           </p:cNvPr>
@@ -4202,7 +4496,7 @@
     </p:spTree>
     <p:extLst>
       <p:ext uri="{BB962C8B-B14F-4D97-AF65-F5344CB8AC3E}">
-        <p14:creationId xmlns:p14="http://schemas.microsoft.com/office/powerpoint/2010/main" val="1873635520"/>
+        <p14:creationId xmlns:p14="http://schemas.microsoft.com/office/powerpoint/2010/main" val="1315308837"/>
       </p:ext>
     </p:extLst>
   </p:cSld>
